--- a/Topic_E/Exam_Practice/TE-L12_Writing_Workshop_Topic_E_Review_and_Bridge_to_Final_Revision.pptx
+++ b/Topic_E/Exam_Practice/TE-L12_Writing_Workshop_Topic_E_Review_and_Bridge_to_Final_Revision.pptx
@@ -784,7 +784,11 @@
           <a:lstStyle/>
           <a:p>
             <a:r>
-              <a:rPr lang="en-US" dirty="0"/>
+              <a:rPr lang="ar-SA" dirty="0">
+                <a:latin typeface="Amiri" pitchFamily="2" charset="-78"/>
+                <a:ea typeface="Amiri" pitchFamily="2" charset="-78"/>
+                <a:cs typeface="Amiri" pitchFamily="2" charset="-78"/>
+              </a:rPr>
               <a:t>Q3 (3 min to choose and read). Title (أ) suits Core and Develop; title (ب) suits Stretch.</a:t>
             </a:r>
             <a:endParaRPr lang="en-US" dirty="0"/>
@@ -1403,7 +1407,11 @@
           <a:lstStyle/>
           <a:p>
             <a:r>
-              <a:rPr lang="en-US" dirty="0"/>
+              <a:rPr lang="ar-SA" dirty="0">
+                <a:latin typeface="Amiri" pitchFamily="2" charset="-78"/>
+                <a:ea typeface="Amiri" pitchFamily="2" charset="-78"/>
+                <a:cs typeface="Amiri" pitchFamily="2" charset="-78"/>
+              </a:rPr>
               <a:t>WELCOME (1 min) — while students join.
 • Greet each student by name as they arrive: السَّلَامُ عَلَيْكُمْ. Take the register (Pastoral Tracker: attendance 0/1).
 • 2-MINUTE CHECK-IN (SEND training): a private chat to any student who seemed unsettled last lesson — “Are you okay today? 👍 / 👎”.
@@ -1936,7 +1944,11 @@
           <a:lstStyle/>
           <a:p>
             <a:r>
-              <a:rPr lang="en-US" dirty="0"/>
+              <a:rPr lang="ar-SA" dirty="0">
+                <a:latin typeface="Amiri" pitchFamily="2" charset="-78"/>
+                <a:ea typeface="Amiri" pitchFamily="2" charset="-78"/>
+                <a:cs typeface="Amiri" pitchFamily="2" charset="-78"/>
+              </a:rPr>
               <a:t>Question words: مَنْ (who) · كَمْ سَتَبْقَى (how long — FUTURE) · فَعَلْتُمَا (you two did — PAST dual) · لَاحَظْتُمَاهُ (you two noticed it) · خِطَطُكِ (plans).</a:t>
             </a:r>
             <a:endParaRPr lang="en-US" dirty="0"/>
@@ -2508,6 +2520,7 @@
                   <a:srgbClr val="D4AF37"/>
                 </a:solidFill>
                 <a:latin typeface="Amiri" pitchFamily="2" charset="-78"/>
+                <a:ea typeface="Amiri" pitchFamily="2" charset="-78"/>
                 <a:cs typeface="Amiri" pitchFamily="2" charset="-78"/>
               </a:rPr>
               <a:t>م</a:t>
@@ -2714,6 +2727,7 @@
                   <a:srgbClr val="D4AF37"/>
                 </a:solidFill>
                 <a:latin typeface="Amiri" pitchFamily="2" charset="-78"/>
+                <a:ea typeface="Amiri" pitchFamily="2" charset="-78"/>
                 <a:cs typeface="Amiri" pitchFamily="2" charset="-78"/>
               </a:rPr>
               <a:t>وَرْشَةُ الكِتَابَةِ — امْتِحَانٌ تَجْرِيبِيٌّ</a:t>
@@ -3171,6 +3185,7 @@
                   <a:srgbClr val="D4AF37"/>
                 </a:solidFill>
                 <a:latin typeface="Amiri" pitchFamily="2" charset="-78"/>
+                <a:ea typeface="Amiri" pitchFamily="2" charset="-78"/>
                 <a:cs typeface="Amiri" pitchFamily="2" charset="-78"/>
               </a:rPr>
               <a:t>م</a:t>
@@ -3491,6 +3506,7 @@
                   <a:srgbClr val="8A6D1E"/>
                 </a:solidFill>
                 <a:latin typeface="Amiri" pitchFamily="2" charset="-78"/>
+                <a:ea typeface="Amiri" pitchFamily="2" charset="-78"/>
                 <a:cs typeface="Amiri" pitchFamily="2" charset="-78"/>
               </a:rPr>
               <a:t>نَمُوذَجُ الإِجَابَةِ</a:t>
@@ -3604,6 +3620,7 @@
                   <a:srgbClr val="1F2A37"/>
                 </a:solidFill>
                 <a:latin typeface="Amiri" pitchFamily="2" charset="-78"/>
+                <a:ea typeface="Amiri" pitchFamily="2" charset="-78"/>
                 <a:cs typeface="Amiri" pitchFamily="2" charset="-78"/>
               </a:rPr>
               <a:t>مَرْحَبًا يَا رِيمُ،</a:t>
@@ -3623,6 +3640,7 @@
                   <a:srgbClr val="1F2A37"/>
                 </a:solidFill>
                 <a:latin typeface="Amiri" pitchFamily="2" charset="-78"/>
+                <a:ea typeface="Amiri" pitchFamily="2" charset="-78"/>
                 <a:cs typeface="Amiri" pitchFamily="2" charset="-78"/>
               </a:rPr>
               <a:t>كَيْفَ حَالُكِ؟ عِنْدِي ضَيْفَةٌ جَدِيدَةٌ فِي البَيْتِ! اسْمُهَا لَمَى، وَهِيَ طَالِبَةُ تَبَادُلٍ أُرْدُنِيَّةٌ. وَصَلَتْ يَوْمَ السَّبْتِ، وَسَتَبْقَى ثَلَاثَةَ أَسَابِيعَ. فِي اليَوْمِ الأَوَّلِ أَخَذْتُهَا إِلَى وَسَطِ لَنْدَنَ، ثُمَّ أَكَلْنَا السَّمَكَ وَالبَطَاطَا. أَمَّا أُمِّي فَطَبَخَتْ لَهَا المَقْلُوبَةَ، لِكَيْ تَشْعُرَ بِأَنَّهَا فِي بَيْتِهَا. لَاحَظَتْ لَمَى أَنَّنَا نَتَعَشَّى مُبَكِّرًا، بَيْنَمَا يَتَعَشَّى النَّاسُ فِي الأُرْدُنِّ مُتَأَخِّرِينَ. أَظُنُّ أَنَّ التَّبَادُلَ مُفِيدٌ جِدًّا، لِأَنَّنَا نَتَعَلَّمُ مِنْ بَعْضِنَا. فِي الصَّيْفِ سَأَزُورُهَا فِي عَمَّانَ. وَأَنْتِ، هَلْ تُرِيدِينَ أَنْ تُقَابِلِيهَا؟</a:t>
@@ -3642,6 +3660,7 @@
                   <a:srgbClr val="1F2A37"/>
                 </a:solidFill>
                 <a:latin typeface="Amiri" pitchFamily="2" charset="-78"/>
+                <a:ea typeface="Amiri" pitchFamily="2" charset="-78"/>
                 <a:cs typeface="Amiri" pitchFamily="2" charset="-78"/>
               </a:rPr>
               <a:t>مَعَ السَّلَامَةِ،</a:t>
@@ -3661,6 +3680,7 @@
                   <a:srgbClr val="1F2A37"/>
                 </a:solidFill>
                 <a:latin typeface="Amiri" pitchFamily="2" charset="-78"/>
+                <a:ea typeface="Amiri" pitchFamily="2" charset="-78"/>
                 <a:cs typeface="Amiri" pitchFamily="2" charset="-78"/>
               </a:rPr>
               <a:t>سُمَيَّةُ</a:t>
@@ -3824,11 +3844,12 @@
               <a:buNone/>
             </a:pPr>
             <a:r>
-              <a:rPr lang="en-US" sz="950" b="1" dirty="0">
+              <a:rPr lang="ar-SA" sz="950" b="1" dirty="0">
                 <a:solidFill>
                   <a:srgbClr val="FFFFFF"/>
                 </a:solidFill>
                 <a:latin typeface="Calibri" pitchFamily="34" charset="0"/>
+                <a:ea typeface="Amiri" pitchFamily="2" charset="-78"/>
                 <a:cs typeface="Amiri" pitchFamily="2" charset="-78"/>
               </a:rPr>
               <a:t>أُرْدُنِيَّةٌ</a:t>
@@ -3889,11 +3910,12 @@
               <a:buNone/>
             </a:pPr>
             <a:r>
-              <a:rPr lang="en-US" sz="950" b="1" dirty="0">
+              <a:rPr lang="ar-SA" sz="950" b="1" dirty="0">
                 <a:solidFill>
                   <a:srgbClr val="FFFFFF"/>
                 </a:solidFill>
                 <a:latin typeface="Calibri" pitchFamily="34" charset="0"/>
+                <a:ea typeface="Amiri" pitchFamily="2" charset="-78"/>
                 <a:cs typeface="Amiri" pitchFamily="2" charset="-78"/>
               </a:rPr>
               <a:t>أَخَذْتُهَا</a:t>
@@ -3954,11 +3976,12 @@
               <a:buNone/>
             </a:pPr>
             <a:r>
-              <a:rPr lang="en-US" sz="950" b="1" dirty="0">
+              <a:rPr lang="ar-SA" sz="950" b="1" dirty="0">
                 <a:solidFill>
                   <a:srgbClr val="FFFFFF"/>
                 </a:solidFill>
                 <a:latin typeface="Calibri" pitchFamily="34" charset="0"/>
+                <a:ea typeface="Amiri" pitchFamily="2" charset="-78"/>
                 <a:cs typeface="Amiri" pitchFamily="2" charset="-78"/>
               </a:rPr>
               <a:t>أَمَّا أُمِّي فَطَبَخَتْ</a:t>
@@ -4019,11 +4042,12 @@
               <a:buNone/>
             </a:pPr>
             <a:r>
-              <a:rPr lang="en-US" sz="950" b="1" dirty="0">
+              <a:rPr lang="ar-SA" sz="950" b="1" dirty="0">
                 <a:solidFill>
                   <a:srgbClr val="FFFFFF"/>
                 </a:solidFill>
                 <a:latin typeface="Calibri" pitchFamily="34" charset="0"/>
+                <a:ea typeface="Amiri" pitchFamily="2" charset="-78"/>
                 <a:cs typeface="Amiri" pitchFamily="2" charset="-78"/>
               </a:rPr>
               <a:t>بَيْنَمَا يَتَعَشَّى</a:t>
@@ -4157,6 +4181,7 @@
                   <a:srgbClr val="D4AF37"/>
                 </a:solidFill>
                 <a:latin typeface="Amiri" pitchFamily="2" charset="-78"/>
+                <a:ea typeface="Amiri" pitchFamily="2" charset="-78"/>
                 <a:cs typeface="Amiri" pitchFamily="2" charset="-78"/>
               </a:rPr>
               <a:t>م</a:t>
@@ -4477,6 +4502,7 @@
                   <a:srgbClr val="8A6D1E"/>
                 </a:solidFill>
                 <a:latin typeface="Amiri" pitchFamily="2" charset="-78"/>
+                <a:ea typeface="Amiri" pitchFamily="2" charset="-78"/>
                 <a:cs typeface="Amiri" pitchFamily="2" charset="-78"/>
               </a:rPr>
               <a:t>نَمُوذَجُ الإِجَابَةِ</a:t>
@@ -4590,6 +4616,7 @@
                   <a:srgbClr val="1F2A37"/>
                 </a:solidFill>
                 <a:latin typeface="Amiri" pitchFamily="2" charset="-78"/>
+                <a:ea typeface="Amiri" pitchFamily="2" charset="-78"/>
                 <a:cs typeface="Amiri" pitchFamily="2" charset="-78"/>
               </a:rPr>
               <a:t>عَزِيزَتِي رِيمُ،</a:t>
@@ -4609,6 +4636,7 @@
                   <a:srgbClr val="1F2A37"/>
                 </a:solidFill>
                 <a:latin typeface="Amiri" pitchFamily="2" charset="-78"/>
+                <a:ea typeface="Amiri" pitchFamily="2" charset="-78"/>
                 <a:cs typeface="Amiri" pitchFamily="2" charset="-78"/>
               </a:rPr>
               <a:t>صَارَ بَيْتُنَا هٰذَا الأُسْبُوعَ أَكْثَرَ ازْدِحَامًا وَدِفْئًا؛ فَقَدْ وَصَلَتْ لَمَى، طَالِبَةُ التَّبَادُلِ الأُرْدُنِيَّةُ الَّتِي سَتُقِيمُ عِنْدَنَا ثَلَاثَةَ أَسَابِيعَ. حَرَصْتُ عَلَى أَنْ أُرِيَهَا لَنْدَنَ الحَقِيقِيَّةَ، فَأَخَذْتُهَا إِلَى سُوقٍ شَعْبِيٍّ بَدَلًا مِنَ المَحَلَّاتِ السِّيَاحِيَّةِ، بَيْنَمَا حَرَصَتْ أُمِّي عَلَى أَنْ تَطْبُخَ لَهَا المَقْلُوبَةَ كَيْ لَا تَشْتَاقَ إِلَى بَيْتِهَا. وَأَكْثَرُ مَا أَضْحَكَنَا أَنَّهَا اسْتَغْرَبَتْ عَشَاءَنَا فِي السَّادِسَةِ، لِأَنَّهُمْ لَا يَتَعَشَّوْنَ فِي عَمَّانَ قَبْلَ التَّاسِعَةِ! صَحِيحٌ أَنَّ عَادَاتِنَا مُخْتَلِفَةٌ، غَيْرَ أَنَّنَا اكْتَشَفْنَا أَنَّ مَا يَجْمَعُنَا أَكْثَرُ بِكَثِيرٍ. وَإِذَا سَمَحَ وَالِدَايَ، فَسَأُرَافِقُهَا إِلَى الأُرْدُنِّ فِي الصَّيْفِ. أَلَا تُرِيدِينَ أَنْ تَتَعَشَّيْ مَعَنَا يَوْمَ الجُمُعَةِ؟</a:t>
@@ -4628,6 +4656,7 @@
                   <a:srgbClr val="1F2A37"/>
                 </a:solidFill>
                 <a:latin typeface="Amiri" pitchFamily="2" charset="-78"/>
+                <a:ea typeface="Amiri" pitchFamily="2" charset="-78"/>
                 <a:cs typeface="Amiri" pitchFamily="2" charset="-78"/>
               </a:rPr>
               <a:t>بِمَحَبَّةٍ،</a:t>
@@ -4647,6 +4676,7 @@
                   <a:srgbClr val="1F2A37"/>
                 </a:solidFill>
                 <a:latin typeface="Amiri" pitchFamily="2" charset="-78"/>
+                <a:ea typeface="Amiri" pitchFamily="2" charset="-78"/>
                 <a:cs typeface="Amiri" pitchFamily="2" charset="-78"/>
               </a:rPr>
               <a:t>سُمَيَّةُ</a:t>
@@ -4810,11 +4840,12 @@
               <a:buNone/>
             </a:pPr>
             <a:r>
-              <a:rPr lang="en-US" sz="950" b="1" dirty="0">
+              <a:rPr lang="ar-SA" sz="950" b="1" dirty="0">
                 <a:solidFill>
                   <a:srgbClr val="FFFFFF"/>
                 </a:solidFill>
                 <a:latin typeface="Calibri" pitchFamily="34" charset="0"/>
+                <a:ea typeface="Amiri" pitchFamily="2" charset="-78"/>
                 <a:cs typeface="Amiri" pitchFamily="2" charset="-78"/>
               </a:rPr>
               <a:t>أَكْثَرَ ازْدِحَامًا وَدِفْئًا</a:t>
@@ -4875,11 +4906,12 @@
               <a:buNone/>
             </a:pPr>
             <a:r>
-              <a:rPr lang="en-US" sz="950" b="1" dirty="0">
+              <a:rPr lang="ar-SA" sz="950" b="1" dirty="0">
                 <a:solidFill>
                   <a:srgbClr val="FFFFFF"/>
                 </a:solidFill>
                 <a:latin typeface="Calibri" pitchFamily="34" charset="0"/>
+                <a:ea typeface="Amiri" pitchFamily="2" charset="-78"/>
                 <a:cs typeface="Amiri" pitchFamily="2" charset="-78"/>
               </a:rPr>
               <a:t>الَّتِي سَتُقِيمُ</a:t>
@@ -4940,11 +4972,12 @@
               <a:buNone/>
             </a:pPr>
             <a:r>
-              <a:rPr lang="en-US" sz="950" b="1" dirty="0">
+              <a:rPr lang="ar-SA" sz="950" b="1" dirty="0">
                 <a:solidFill>
                   <a:srgbClr val="FFFFFF"/>
                 </a:solidFill>
                 <a:latin typeface="Calibri" pitchFamily="34" charset="0"/>
+                <a:ea typeface="Amiri" pitchFamily="2" charset="-78"/>
                 <a:cs typeface="Amiri" pitchFamily="2" charset="-78"/>
               </a:rPr>
               <a:t>بَدَلًا مِنَ … بَيْنَمَا</a:t>
@@ -5005,11 +5038,12 @@
               <a:buNone/>
             </a:pPr>
             <a:r>
-              <a:rPr lang="en-US" sz="950" b="1" dirty="0">
+              <a:rPr lang="ar-SA" sz="950" b="1" dirty="0">
                 <a:solidFill>
                   <a:srgbClr val="FFFFFF"/>
                 </a:solidFill>
                 <a:latin typeface="Calibri" pitchFamily="34" charset="0"/>
+                <a:ea typeface="Amiri" pitchFamily="2" charset="-78"/>
                 <a:cs typeface="Amiri" pitchFamily="2" charset="-78"/>
               </a:rPr>
               <a:t>إِذَا سَمَحَ … فَسَأُرَافِقُهَا</a:t>
@@ -5143,6 +5177,7 @@
                   <a:srgbClr val="D4AF37"/>
                 </a:solidFill>
                 <a:latin typeface="Amiri" pitchFamily="2" charset="-78"/>
+                <a:ea typeface="Amiri" pitchFamily="2" charset="-78"/>
                 <a:cs typeface="Amiri" pitchFamily="2" charset="-78"/>
               </a:rPr>
               <a:t>م</a:t>
@@ -5463,6 +5498,7 @@
                   <a:srgbClr val="8A6D1E"/>
                 </a:solidFill>
                 <a:latin typeface="Amiri" pitchFamily="2" charset="-78"/>
+                <a:ea typeface="Amiri" pitchFamily="2" charset="-78"/>
                 <a:cs typeface="Amiri" pitchFamily="2" charset="-78"/>
               </a:rPr>
               <a:t>اخْتَرْ عُنْوَانًا وَاحِدًا</a:t>
@@ -5743,6 +5779,7 @@
                   <a:srgbClr val="1B3B6F"/>
                 </a:solidFill>
                 <a:latin typeface="Amiri" pitchFamily="2" charset="-78"/>
+                <a:ea typeface="Amiri" pitchFamily="2" charset="-78"/>
                 <a:cs typeface="Amiri" pitchFamily="2" charset="-78"/>
               </a:rPr>
               <a:t>تَجْرِبَةٌ عَرَّفَتْنِي بِثَقَافَةٍ أُخْرَى</a:t>
@@ -5781,6 +5818,7 @@
                   <a:srgbClr val="1B3B6F"/>
                 </a:solidFill>
                 <a:latin typeface="Amiri" pitchFamily="2" charset="-78"/>
+                <a:ea typeface="Amiri" pitchFamily="2" charset="-78"/>
                 <a:cs typeface="Amiri" pitchFamily="2" charset="-78"/>
               </a:rPr>
               <a:t>(أ)</a:t>
@@ -5887,6 +5925,7 @@
                   <a:srgbClr val="1B3B6F"/>
                 </a:solidFill>
                 <a:latin typeface="Amiri" pitchFamily="2" charset="-78"/>
+                <a:ea typeface="Amiri" pitchFamily="2" charset="-78"/>
                 <a:cs typeface="Amiri" pitchFamily="2" charset="-78"/>
               </a:rPr>
               <a:t>مَا التَّجْرِبَةُ وَمَتَى · الاخْتِلَافَاتُ وَالتَّشَابُهَاتُ · لَحْظَةٌ مُهِمَّةٌ · مَا تَعَلَّمْتَهُ وَخُطَطُكَ</a:t>
@@ -6018,6 +6057,7 @@
                   <a:srgbClr val="1B3B6F"/>
                 </a:solidFill>
                 <a:latin typeface="Amiri" pitchFamily="2" charset="-78"/>
+                <a:ea typeface="Amiri" pitchFamily="2" charset="-78"/>
                 <a:cs typeface="Amiri" pitchFamily="2" charset="-78"/>
               </a:rPr>
               <a:t>هَلْ يَجِبُ أَنْ تُدَرَّسَ الثَّقَافَاتُ وَالأَدْيَانُ فِي كُلِّ المَدَارِسِ؟</a:t>
@@ -6056,6 +6096,7 @@
                   <a:srgbClr val="1B3B6F"/>
                 </a:solidFill>
                 <a:latin typeface="Amiri" pitchFamily="2" charset="-78"/>
+                <a:ea typeface="Amiri" pitchFamily="2" charset="-78"/>
                 <a:cs typeface="Amiri" pitchFamily="2" charset="-78"/>
               </a:rPr>
               <a:t>(ب)</a:t>
@@ -6159,6 +6200,7 @@
                   <a:srgbClr val="1B3B6F"/>
                 </a:solidFill>
                 <a:latin typeface="Amiri" pitchFamily="2" charset="-78"/>
+                <a:ea typeface="Amiri" pitchFamily="2" charset="-78"/>
                 <a:cs typeface="Amiri" pitchFamily="2" charset="-78"/>
               </a:rPr>
               <a:t>المَوْضُوعُ · الآرَاءُ المُخْتَلِفَةُ · مِثَالٌ مِنْ مَدْرَسَتِكَ · رَأْيُكَ</a:t>
@@ -6358,6 +6400,7 @@
                   <a:srgbClr val="D4AF37"/>
                 </a:solidFill>
                 <a:latin typeface="Amiri" pitchFamily="2" charset="-78"/>
+                <a:ea typeface="Amiri" pitchFamily="2" charset="-78"/>
                 <a:cs typeface="Amiri" pitchFamily="2" charset="-78"/>
               </a:rPr>
               <a:t>م</a:t>
@@ -6678,6 +6721,7 @@
                   <a:srgbClr val="8A6D1E"/>
                 </a:solidFill>
                 <a:latin typeface="Amiri" pitchFamily="2" charset="-78"/>
+                <a:ea typeface="Amiri" pitchFamily="2" charset="-78"/>
                 <a:cs typeface="Amiri" pitchFamily="2" charset="-78"/>
               </a:rPr>
               <a:t>خُطَّةُ الكِتَابَةِ</a:t>
@@ -7302,6 +7346,7 @@
                   <a:srgbClr val="1B3B6F"/>
                 </a:solidFill>
                 <a:latin typeface="Amiri" pitchFamily="2" charset="-78"/>
+                <a:ea typeface="Amiri" pitchFamily="2" charset="-78"/>
                 <a:cs typeface="Amiri" pitchFamily="2" charset="-78"/>
               </a:rPr>
               <a:t>كَانَتْ تَنْحَنِي، بَيْنَمَا نَحْنُ نُصَافِحُ.</a:t>
@@ -7401,6 +7446,7 @@
                   <a:srgbClr val="1B3B6F"/>
                 </a:solidFill>
                 <a:latin typeface="Amiri" pitchFamily="2" charset="-78"/>
+                <a:ea typeface="Amiri" pitchFamily="2" charset="-78"/>
                 <a:cs typeface="Amiri" pitchFamily="2" charset="-78"/>
               </a:rPr>
               <a:t>صَامَتْ مَعَنَا لِكَيْ تَفْهَمَ تَجْرِبَتَنَا.</a:t>
@@ -7500,6 +7546,7 @@
                   <a:srgbClr val="1B3B6F"/>
                 </a:solidFill>
                 <a:latin typeface="Amiri" pitchFamily="2" charset="-78"/>
+                <a:ea typeface="Amiri" pitchFamily="2" charset="-78"/>
                 <a:cs typeface="Amiri" pitchFamily="2" charset="-78"/>
               </a:rPr>
               <a:t>سَأَزُورُهَا وَأُسْرَتَهَا بَعْدَ الامْتِحَانَاتِ.</a:t>
@@ -7661,6 +7708,7 @@
                   <a:srgbClr val="1F2A37"/>
                 </a:solidFill>
                 <a:latin typeface="Amiri" pitchFamily="2" charset="-78"/>
+                <a:ea typeface="Amiri" pitchFamily="2" charset="-78"/>
                 <a:cs typeface="Amiri" pitchFamily="2" charset="-78"/>
               </a:rPr>
               <a:t>أ</a:t>
@@ -7687,6 +7735,7 @@
                   <a:srgbClr val="1F2A37"/>
                 </a:solidFill>
                 <a:latin typeface="Amiri" pitchFamily="2" charset="-78"/>
+                <a:ea typeface="Amiri" pitchFamily="2" charset="-78"/>
                 <a:cs typeface="Amiri" pitchFamily="2" charset="-78"/>
               </a:rPr>
               <a:t>ب</a:t>
@@ -7833,6 +7882,7 @@
                   <a:srgbClr val="D4AF37"/>
                 </a:solidFill>
                 <a:latin typeface="Amiri" pitchFamily="2" charset="-78"/>
+                <a:ea typeface="Amiri" pitchFamily="2" charset="-78"/>
                 <a:cs typeface="Amiri" pitchFamily="2" charset="-78"/>
               </a:rPr>
               <a:t>م</a:t>
@@ -8090,6 +8140,7 @@
                   <a:srgbClr val="8A6D1E"/>
                 </a:solidFill>
                 <a:latin typeface="Amiri" pitchFamily="2" charset="-78"/>
+                <a:ea typeface="Amiri" pitchFamily="2" charset="-78"/>
                 <a:cs typeface="Amiri" pitchFamily="2" charset="-78"/>
               </a:rPr>
               <a:t>أ</a:t>
@@ -8154,6 +8205,7 @@
                   <a:srgbClr val="1B3B6F"/>
                 </a:solidFill>
                 <a:latin typeface="Amiri" pitchFamily="2" charset="-78"/>
+                <a:ea typeface="Amiri" pitchFamily="2" charset="-78"/>
                 <a:cs typeface="Amiri" pitchFamily="2" charset="-78"/>
               </a:rPr>
               <a:t>أ</a:t>
@@ -8205,6 +8257,7 @@
                   <a:srgbClr val="8A6D1E"/>
                 </a:solidFill>
                 <a:latin typeface="Amiri" pitchFamily="2" charset="-78"/>
+                <a:ea typeface="Amiri" pitchFamily="2" charset="-78"/>
                 <a:cs typeface="Amiri" pitchFamily="2" charset="-78"/>
               </a:rPr>
               <a:t>نَمُوذَجُ الإِجَابَةِ</a:t>
@@ -8318,6 +8371,7 @@
                   <a:srgbClr val="1F2A37"/>
                 </a:solidFill>
                 <a:latin typeface="Amiri" pitchFamily="2" charset="-78"/>
+                <a:ea typeface="Amiri" pitchFamily="2" charset="-78"/>
                 <a:cs typeface="Amiri" pitchFamily="2" charset="-78"/>
               </a:rPr>
               <a:t>فِي السَّنَةِ المَاضِيَةِ اسْتَقْبَلَتْ أُسْرَتِي طَالِبَةَ تَبَادُلٍ مِنَ اليَابَانِ اسْمُهَا يُوكِي. بَقِيَتْ عِنْدَنَا شَهْرًا كَامِلًا، وَكَانَتْ هٰذِهِ أَوَّلَ مَرَّةٍ أَتَعَرَّفُ فِيهَا عَلَى ثَقَافَةٍ بَعِيدَةٍ جِدًّا عَنْ ثَقَافَتِي.</a:t>
@@ -8337,6 +8391,7 @@
                   <a:srgbClr val="1F2A37"/>
                 </a:solidFill>
                 <a:latin typeface="Amiri" pitchFamily="2" charset="-78"/>
+                <a:ea typeface="Amiri" pitchFamily="2" charset="-78"/>
                 <a:cs typeface="Amiri" pitchFamily="2" charset="-78"/>
               </a:rPr>
               <a:t>أَوَّلًا، لَاحَظْتُ أَنَّ يُوكِي هَادِئَةٌ وَمُؤَدَّبَةٌ جِدًّا. كَانَتْ تَنْحَنِي لِتُحَيِّيَ أُمِّي، بَيْنَمَا نَحْنُ نُصَافِحُ أَوْ نُقَبِّلُ. وَكَانَتْ تَخْلَعُ حِذَاءَهَا عِنْدَ البَابِ مِثْلَنَا تَمَامًا، لِأَنَّهُمْ فِي اليَابَانِ يَفْعَلُونَ ذٰلِكَ أَيْضًا.</a:t>
@@ -8356,6 +8411,7 @@
                   <a:srgbClr val="1F2A37"/>
                 </a:solidFill>
                 <a:latin typeface="Amiri" pitchFamily="2" charset="-78"/>
+                <a:ea typeface="Amiri" pitchFamily="2" charset="-78"/>
                 <a:cs typeface="Amiri" pitchFamily="2" charset="-78"/>
               </a:rPr>
               <a:t>بِالإِضَافَةِ إِلَى ذٰلِكَ، عَلَّمَتْنِي كَلِمَاتٍ يَابَانِيَّةً، وَعَلَّمْتُهَا الحُرُوفَ العَرَبِيَّةَ وَكِتَابَةَ اسْمِهَا. فِي رَمَضَانَ صَامَتْ يَوْمًا وَاحِدًا مَعَنَا، لِكَيْ تَفْهَمَ تَجْرِبَتَنَا، ثُمَّ أَفْطَرْنَا مَعًا. كَانَ ذٰلِكَ اليَوْمُ جَمِيلًا جِدًّا، وَلَنْ أَنْسَاهُ أَبَدًا.</a:t>
@@ -8375,6 +8431,7 @@
                   <a:srgbClr val="1F2A37"/>
                 </a:solidFill>
                 <a:latin typeface="Amiri" pitchFamily="2" charset="-78"/>
+                <a:ea typeface="Amiri" pitchFamily="2" charset="-78"/>
                 <a:cs typeface="Amiri" pitchFamily="2" charset="-78"/>
               </a:rPr>
               <a:t>تَعَلَّمْتُ أَنَّ الثَّقَافَاتِ مُخْتَلِفَةٌ، لٰكِنَّ النَّاسَ يَتَشَابَهُونَ فِي أَشْيَاءَ كَثِيرَةٍ، مِثْلَ احْتِرَامِ الكِبَارِ وَحُبِّ العَائِلَةِ. لِذٰلِكَ سَأُسَافِرُ إِلَى اليَابَانِ بَعْدَ الامْتِحَانَاتِ، وَسَأَزُورُ يُوكِي وَأُسْرَتَهَا إِنْ شَاءَ اللّٰهُ.</a:t>
@@ -8538,11 +8595,12 @@
               <a:buNone/>
             </a:pPr>
             <a:r>
-              <a:rPr lang="en-US" sz="950" b="1" dirty="0">
+              <a:rPr lang="ar-SA" sz="950" b="1" dirty="0">
                 <a:solidFill>
                   <a:srgbClr val="FFFFFF"/>
                 </a:solidFill>
                 <a:latin typeface="Calibri" pitchFamily="34" charset="0"/>
+                <a:ea typeface="Amiri" pitchFamily="2" charset="-78"/>
                 <a:cs typeface="Amiri" pitchFamily="2" charset="-78"/>
               </a:rPr>
               <a:t>بَيْنَمَا نَحْنُ</a:t>
@@ -8603,11 +8661,12 @@
               <a:buNone/>
             </a:pPr>
             <a:r>
-              <a:rPr lang="en-US" sz="950" b="1" dirty="0">
+              <a:rPr lang="ar-SA" sz="950" b="1" dirty="0">
                 <a:solidFill>
                   <a:srgbClr val="FFFFFF"/>
                 </a:solidFill>
                 <a:latin typeface="Calibri" pitchFamily="34" charset="0"/>
+                <a:ea typeface="Amiri" pitchFamily="2" charset="-78"/>
                 <a:cs typeface="Amiri" pitchFamily="2" charset="-78"/>
               </a:rPr>
               <a:t>مِثْلَنَا تَمَامًا</a:t>
@@ -8668,11 +8727,12 @@
               <a:buNone/>
             </a:pPr>
             <a:r>
-              <a:rPr lang="en-US" sz="950" b="1" dirty="0">
+              <a:rPr lang="ar-SA" sz="950" b="1" dirty="0">
                 <a:solidFill>
                   <a:srgbClr val="FFFFFF"/>
                 </a:solidFill>
                 <a:latin typeface="Calibri" pitchFamily="34" charset="0"/>
+                <a:ea typeface="Amiri" pitchFamily="2" charset="-78"/>
                 <a:cs typeface="Amiri" pitchFamily="2" charset="-78"/>
               </a:rPr>
               <a:t>لِكَيْ تَفْهَمَ</a:t>
@@ -8733,11 +8793,12 @@
               <a:buNone/>
             </a:pPr>
             <a:r>
-              <a:rPr lang="en-US" sz="950" b="1" dirty="0">
+              <a:rPr lang="ar-SA" sz="950" b="1" dirty="0">
                 <a:solidFill>
                   <a:srgbClr val="FFFFFF"/>
                 </a:solidFill>
                 <a:latin typeface="Calibri" pitchFamily="34" charset="0"/>
+                <a:ea typeface="Amiri" pitchFamily="2" charset="-78"/>
                 <a:cs typeface="Amiri" pitchFamily="2" charset="-78"/>
               </a:rPr>
               <a:t>لِذٰلِكَ سَأُسَافِرُ</a:t>
@@ -8871,6 +8932,7 @@
                   <a:srgbClr val="D4AF37"/>
                 </a:solidFill>
                 <a:latin typeface="Amiri" pitchFamily="2" charset="-78"/>
+                <a:ea typeface="Amiri" pitchFamily="2" charset="-78"/>
                 <a:cs typeface="Amiri" pitchFamily="2" charset="-78"/>
               </a:rPr>
               <a:t>م</a:t>
@@ -9128,6 +9190,7 @@
                   <a:srgbClr val="8A6D1E"/>
                 </a:solidFill>
                 <a:latin typeface="Amiri" pitchFamily="2" charset="-78"/>
+                <a:ea typeface="Amiri" pitchFamily="2" charset="-78"/>
                 <a:cs typeface="Amiri" pitchFamily="2" charset="-78"/>
               </a:rPr>
               <a:t>أ</a:t>
@@ -9192,6 +9255,7 @@
                   <a:srgbClr val="1B3B6F"/>
                 </a:solidFill>
                 <a:latin typeface="Amiri" pitchFamily="2" charset="-78"/>
+                <a:ea typeface="Amiri" pitchFamily="2" charset="-78"/>
                 <a:cs typeface="Amiri" pitchFamily="2" charset="-78"/>
               </a:rPr>
               <a:t>أ</a:t>
@@ -9243,6 +9307,7 @@
                   <a:srgbClr val="8A6D1E"/>
                 </a:solidFill>
                 <a:latin typeface="Amiri" pitchFamily="2" charset="-78"/>
+                <a:ea typeface="Amiri" pitchFamily="2" charset="-78"/>
                 <a:cs typeface="Amiri" pitchFamily="2" charset="-78"/>
               </a:rPr>
               <a:t>نَمُوذَجُ الإِجَابَةِ</a:t>
@@ -9356,6 +9421,7 @@
                   <a:srgbClr val="1F2A37"/>
                 </a:solidFill>
                 <a:latin typeface="Amiri" pitchFamily="2" charset="-78"/>
+                <a:ea typeface="Amiri" pitchFamily="2" charset="-78"/>
                 <a:cs typeface="Amiri" pitchFamily="2" charset="-78"/>
               </a:rPr>
               <a:t>حِينَ فَتَحْتُ البَابَ لِيُوكِي، الطَّالِبَةِ اليَابَانِيَّةِ الَّتِي اسْتَضَفْنَاهَا شَهْرًا، انْحَنَتْ أَمَامِي بِأَدَبٍ، فَارْتَبَكْتُ وَمَدَدْتُ يَدِي! وَكَانَتْ تِلْكَ اللَّحْظَةُ المُضْحِكَةُ بِدَايَةَ رِحْلَةٍ عَرَّفَتْنِي بِثَقَافَةٍ لَمْ أَكُنْ أَعْرِفُ عَنْهَا إِلَّا الأَفْلَامَ وَالرُّسُومَ المُتَحَرِّكَةَ.</a:t>
@@ -9375,6 +9441,7 @@
                   <a:srgbClr val="1F2A37"/>
                 </a:solidFill>
                 <a:latin typeface="Amiri" pitchFamily="2" charset="-78"/>
+                <a:ea typeface="Amiri" pitchFamily="2" charset="-78"/>
                 <a:cs typeface="Amiri" pitchFamily="2" charset="-78"/>
               </a:rPr>
               <a:t>وَسُرْعَانَ مَا اكْتَشَفْتُ أَنَّ المَسَافَةَ بَيْنَ لَنْدَنَ وَطُوكْيُو أَقْصَرُ مِمَّا كُنْتُ أَظُنُّ؛ فَيُوكِي تَخْلَعُ حِذَاءَهَا عِنْدَ البَابِ مِثْلَنَا، وَتُقَدِّسُ احْتِرَامَ الكِبَارِ كَجَدَّتِي، وَتَرَى أَنَّ الضَّيْفَ يَجِبُ أَنْ يُكْرَمَ، وَأَنْ يُقَدَّمَ لَهُ أَفْضَلُ مَا فِي البَيْتِ.</a:t>
@@ -9394,6 +9461,7 @@
                   <a:srgbClr val="1F2A37"/>
                 </a:solidFill>
                 <a:latin typeface="Amiri" pitchFamily="2" charset="-78"/>
+                <a:ea typeface="Amiri" pitchFamily="2" charset="-78"/>
                 <a:cs typeface="Amiri" pitchFamily="2" charset="-78"/>
               </a:rPr>
               <a:t>غَيْرَ أَنَّ أَعْمَقَ مَا تَعَلَّمْتُهُ جَاءَ فِي رَمَضَانَ؛ إِذْ طَلَبَتْ أَنْ تَصُومَ مَعَنَا يَوْمًا وَاحِدًا "لِتَفْهَمَ"، كَمَا قَالَتْ. وَعِنْدَ الإِفْطَارِ، بَعْدَ يَوْمٍ طَوِيلٍ مِنَ الجُوعِ وَالعَطَشِ، وَضَعَتْ يَدَهَا عَلَى قَلْبِهَا وَقَالَتْ: "الآنَ أَعْرِفُ لِمَاذَا تُحِبُّونَ هٰذَا الشَّهْرَ". فَأَدْرَكْتُ أَنَّ الاحْتِرَامَ لَيْسَ أَنْ نَتَشَابَهَ، بَلْ أَنْ نُحَاوِلَ الفَهْمَ، وَأَنْ نَحْتَرِمَ مَا لَا نَفْهَمُهُ بَعْدُ.</a:t>
@@ -9413,6 +9481,7 @@
                   <a:srgbClr val="1F2A37"/>
                 </a:solidFill>
                 <a:latin typeface="Amiri" pitchFamily="2" charset="-78"/>
+                <a:ea typeface="Amiri" pitchFamily="2" charset="-78"/>
                 <a:cs typeface="Amiri" pitchFamily="2" charset="-78"/>
               </a:rPr>
               <a:t>وَلَوْ سَأَلَنِي أَحَدٌ الآنَ مَاذَا يَعْنِي التَّبَادُلُ الثَّقَافِيُّ، لَقُلْتُ: "أَنْ تَفْتَحَ بَابَكَ لِغَرِيبٍ، فَتُغْلِقَهُ بَعْدَ شَهْرٍ عَلَى صَدِيقَةٍ".</a:t>
@@ -9511,11 +9580,12 @@
               <a:buNone/>
             </a:pPr>
             <a:r>
-              <a:rPr lang="en-US" sz="950" b="1" dirty="0">
+              <a:rPr lang="ar-SA" sz="950" b="1" dirty="0">
                 <a:solidFill>
                   <a:srgbClr val="FFFFFF"/>
                 </a:solidFill>
                 <a:latin typeface="Calibri" pitchFamily="34" charset="0"/>
+                <a:ea typeface="Amiri" pitchFamily="2" charset="-78"/>
                 <a:cs typeface="Amiri" pitchFamily="2" charset="-78"/>
               </a:rPr>
               <a:t>الَّتِي اسْتَضَفْنَاهَا</a:t>
@@ -9576,11 +9646,12 @@
               <a:buNone/>
             </a:pPr>
             <a:r>
-              <a:rPr lang="en-US" sz="950" b="1" dirty="0">
+              <a:rPr lang="ar-SA" sz="950" b="1" dirty="0">
                 <a:solidFill>
                   <a:srgbClr val="FFFFFF"/>
                 </a:solidFill>
                 <a:latin typeface="Calibri" pitchFamily="34" charset="0"/>
+                <a:ea typeface="Amiri" pitchFamily="2" charset="-78"/>
                 <a:cs typeface="Amiri" pitchFamily="2" charset="-78"/>
               </a:rPr>
               <a:t>أَقْصَرُ مِمَّا كُنْتُ أَظُنُّ</a:t>
@@ -9641,11 +9712,12 @@
               <a:buNone/>
             </a:pPr>
             <a:r>
-              <a:rPr lang="en-US" sz="950" b="1" dirty="0">
+              <a:rPr lang="ar-SA" sz="950" b="1" dirty="0">
                 <a:solidFill>
                   <a:srgbClr val="FFFFFF"/>
                 </a:solidFill>
                 <a:latin typeface="Calibri" pitchFamily="34" charset="0"/>
+                <a:ea typeface="Amiri" pitchFamily="2" charset="-78"/>
                 <a:cs typeface="Amiri" pitchFamily="2" charset="-78"/>
               </a:rPr>
               <a:t>لَيْسَ أَنْ نَتَشَابَهَ، بَلْ</a:t>
@@ -9706,11 +9778,12 @@
               <a:buNone/>
             </a:pPr>
             <a:r>
-              <a:rPr lang="en-US" sz="950" b="1" dirty="0">
+              <a:rPr lang="ar-SA" sz="950" b="1" dirty="0">
                 <a:solidFill>
                   <a:srgbClr val="FFFFFF"/>
                 </a:solidFill>
                 <a:latin typeface="Calibri" pitchFamily="34" charset="0"/>
+                <a:ea typeface="Amiri" pitchFamily="2" charset="-78"/>
                 <a:cs typeface="Amiri" pitchFamily="2" charset="-78"/>
               </a:rPr>
               <a:t>لَوْ سَأَلَنِي … لَقُلْتُ</a:t>
@@ -9844,6 +9917,7 @@
                   <a:srgbClr val="D4AF37"/>
                 </a:solidFill>
                 <a:latin typeface="Amiri" pitchFamily="2" charset="-78"/>
+                <a:ea typeface="Amiri" pitchFamily="2" charset="-78"/>
                 <a:cs typeface="Amiri" pitchFamily="2" charset="-78"/>
               </a:rPr>
               <a:t>م</a:t>
@@ -10101,6 +10175,7 @@
                   <a:srgbClr val="8A6D1E"/>
                 </a:solidFill>
                 <a:latin typeface="Amiri" pitchFamily="2" charset="-78"/>
+                <a:ea typeface="Amiri" pitchFamily="2" charset="-78"/>
                 <a:cs typeface="Amiri" pitchFamily="2" charset="-78"/>
               </a:rPr>
               <a:t>ب</a:t>
@@ -10165,6 +10240,7 @@
                   <a:srgbClr val="1B3B6F"/>
                 </a:solidFill>
                 <a:latin typeface="Amiri" pitchFamily="2" charset="-78"/>
+                <a:ea typeface="Amiri" pitchFamily="2" charset="-78"/>
                 <a:cs typeface="Amiri" pitchFamily="2" charset="-78"/>
               </a:rPr>
               <a:t>ب</a:t>
@@ -10216,6 +10292,7 @@
                   <a:srgbClr val="8A6D1E"/>
                 </a:solidFill>
                 <a:latin typeface="Amiri" pitchFamily="2" charset="-78"/>
+                <a:ea typeface="Amiri" pitchFamily="2" charset="-78"/>
                 <a:cs typeface="Amiri" pitchFamily="2" charset="-78"/>
               </a:rPr>
               <a:t>نَمُوذَجُ الإِجَابَةِ</a:t>
@@ -10329,6 +10406,7 @@
                   <a:srgbClr val="1F2A37"/>
                 </a:solidFill>
                 <a:latin typeface="Amiri" pitchFamily="2" charset="-78"/>
+                <a:ea typeface="Amiri" pitchFamily="2" charset="-78"/>
                 <a:cs typeface="Amiri" pitchFamily="2" charset="-78"/>
               </a:rPr>
               <a:t>فِي صَفِّي ثَلَاثُونَ طَالِبًا مِنْ اثْنَيْ عَشَرَ بَلَدًا وَخَمْسَةِ أَدْيَانٍ. وَمَعَ ذٰلِكَ، لَا نَعْرِفُ عَنْ ثَقَافَاتِ بَعْضِنَا إِلَّا القَلِيلَ، وَأَحْيَانًا مَا هُوَ خَاطِئٌ. فَهَلْ يَجِبُ أَنْ تُدَرَّسَ الثَّقَافَاتُ وَالأَدْيَانُ فِي كُلِّ المَدَارِسِ؟</a:t>
@@ -10348,6 +10426,7 @@
                   <a:srgbClr val="1F2A37"/>
                 </a:solidFill>
                 <a:latin typeface="Amiri" pitchFamily="2" charset="-78"/>
+                <a:ea typeface="Amiri" pitchFamily="2" charset="-78"/>
                 <a:cs typeface="Amiri" pitchFamily="2" charset="-78"/>
               </a:rPr>
               <a:t>مِنْ نَاحِيَةٍ، يَرَى بَعْضُ النَّاسِ أَنَّ المَنْهَجَ مُزْدَحِمٌ أَصْلًا بِالرِّيَاضِيَّاتِ وَالعُلُومِ، وَأَنَّ الثَّقَافَةَ مَسْؤُولِيَّةُ الأُسْرَةِ لَا المَدْرَسَةِ. وَمِنْ نَاحِيَةٍ أُخْرَى، فَإِنَّ الجَهْلَ بِالآخَرِ هُوَ أَوَّلُ أَسْبَابِ الخَوْفِ وَالصُّوَرِ النَّمَطِيَّةِ، مِمَّا يَجْعَلُ هٰذِهِ المَعْرِفَةَ ضَرُورَةً لَا تَرَفًا.</a:t>
@@ -10367,6 +10446,7 @@
                   <a:srgbClr val="1F2A37"/>
                 </a:solidFill>
                 <a:latin typeface="Amiri" pitchFamily="2" charset="-78"/>
+                <a:ea typeface="Amiri" pitchFamily="2" charset="-78"/>
                 <a:cs typeface="Amiri" pitchFamily="2" charset="-78"/>
               </a:rPr>
               <a:t>وَقَدْ رَأَيْتُ أَثَرَ ذٰلِكَ فِي مَدْرَسَتِي؛ فَبَعْدَ أَنْ زُرْنَا مَسْجِدًا وَكَنِيسَةً وَمَعْبَدًا فِي يَوْمٍ وَاحِدٍ، وَتَحَدَّثْنَا مَعَ أَهْلِهَا بِصَرَاحَةٍ وَلُطْفٍ، تَوَقَّفَ زُمَلَاءُ كَثِيرُونَ عَنِ النُّكَتِ الجَارِحَةِ، وَبَدَؤُوا يَطْرَحُونَ أَسْئِلَةً بِفُضُولٍ وَاحْتِرَامٍ عَنْ أَعْيَادِ زُمَلَائِهِمْ وَعَادَاتِهِمْ.</a:t>
@@ -10386,6 +10466,7 @@
                   <a:srgbClr val="1F2A37"/>
                 </a:solidFill>
                 <a:latin typeface="Amiri" pitchFamily="2" charset="-78"/>
+                <a:ea typeface="Amiri" pitchFamily="2" charset="-78"/>
                 <a:cs typeface="Amiri" pitchFamily="2" charset="-78"/>
               </a:rPr>
               <a:t>صَحِيحٌ أَنَّ المَدْرَسَةَ لَا تَسْتَطِيعُ أَنْ تُعَلِّمَ كُلَّ شَيْءٍ، غَيْرَ أَنَّ سَاعَةً وَاحِدَةً فِي الأُسْبُوعِ تَكْفِي لِتَبْدَأَ التَّغْيِيرَ. فَإِذَا تَعَلَّمَ الأَطْفَالُ أَنْ يَسْأَلُوا قَبْلَ أَنْ يَحْكُمُوا، فَسَنَبْنِي مُجْتَمَعًا يَعِيشُ فِيهِ الجَمِيعُ بِأَمَانٍ وَكَرَامَةٍ.</a:t>
@@ -10484,11 +10565,12 @@
               <a:buNone/>
             </a:pPr>
             <a:r>
-              <a:rPr lang="en-US" sz="950" b="1" dirty="0">
+              <a:rPr lang="ar-SA" sz="950" b="1" dirty="0">
                 <a:solidFill>
                   <a:srgbClr val="FFFFFF"/>
                 </a:solidFill>
                 <a:latin typeface="Calibri" pitchFamily="34" charset="0"/>
+                <a:ea typeface="Amiri" pitchFamily="2" charset="-78"/>
                 <a:cs typeface="Amiri" pitchFamily="2" charset="-78"/>
               </a:rPr>
               <a:t>لَا نَعْرِفُ … إِلَّا القَلِيلَ</a:t>
@@ -10549,11 +10631,12 @@
               <a:buNone/>
             </a:pPr>
             <a:r>
-              <a:rPr lang="en-US" sz="950" b="1" dirty="0">
+              <a:rPr lang="ar-SA" sz="950" b="1" dirty="0">
                 <a:solidFill>
                   <a:srgbClr val="FFFFFF"/>
                 </a:solidFill>
                 <a:latin typeface="Calibri" pitchFamily="34" charset="0"/>
+                <a:ea typeface="Amiri" pitchFamily="2" charset="-78"/>
                 <a:cs typeface="Amiri" pitchFamily="2" charset="-78"/>
               </a:rPr>
               <a:t>لَا المَدْرَسَةِ</a:t>
@@ -10614,11 +10697,12 @@
               <a:buNone/>
             </a:pPr>
             <a:r>
-              <a:rPr lang="en-US" sz="950" b="1" dirty="0">
+              <a:rPr lang="ar-SA" sz="950" b="1" dirty="0">
                 <a:solidFill>
                   <a:srgbClr val="FFFFFF"/>
                 </a:solidFill>
                 <a:latin typeface="Calibri" pitchFamily="34" charset="0"/>
+                <a:ea typeface="Amiri" pitchFamily="2" charset="-78"/>
                 <a:cs typeface="Amiri" pitchFamily="2" charset="-78"/>
               </a:rPr>
               <a:t>ضَرُورَةً لَا تَرَفًا</a:t>
@@ -10679,11 +10763,12 @@
               <a:buNone/>
             </a:pPr>
             <a:r>
-              <a:rPr lang="en-US" sz="950" b="1" dirty="0">
+              <a:rPr lang="ar-SA" sz="950" b="1" dirty="0">
                 <a:solidFill>
                   <a:srgbClr val="FFFFFF"/>
                 </a:solidFill>
                 <a:latin typeface="Calibri" pitchFamily="34" charset="0"/>
+                <a:ea typeface="Amiri" pitchFamily="2" charset="-78"/>
                 <a:cs typeface="Amiri" pitchFamily="2" charset="-78"/>
               </a:rPr>
               <a:t>إِذَا تَعَلَّمَ … فَسَنَبْنِي</a:t>
@@ -10817,6 +10902,7 @@
                   <a:srgbClr val="D4AF37"/>
                 </a:solidFill>
                 <a:latin typeface="Amiri" pitchFamily="2" charset="-78"/>
+                <a:ea typeface="Amiri" pitchFamily="2" charset="-78"/>
                 <a:cs typeface="Amiri" pitchFamily="2" charset="-78"/>
               </a:rPr>
               <a:t>م</a:t>
@@ -11137,6 +11223,7 @@
                   <a:srgbClr val="8A6D1E"/>
                 </a:solidFill>
                 <a:latin typeface="Amiri" pitchFamily="2" charset="-78"/>
+                <a:ea typeface="Amiri" pitchFamily="2" charset="-78"/>
                 <a:cs typeface="Amiri" pitchFamily="2" charset="-78"/>
               </a:rPr>
               <a:t>قَيِّمْ عَمَلَكَ</a:t>
@@ -12381,6 +12468,7 @@
                   <a:srgbClr val="FFFFFF"/>
                 </a:solidFill>
                 <a:latin typeface="Amiri" pitchFamily="2" charset="-78"/>
+                <a:ea typeface="Amiri" pitchFamily="2" charset="-78"/>
                 <a:cs typeface="Amiri" pitchFamily="2" charset="-78"/>
               </a:rPr>
               <a:t>أَحْسَنْتُمْ! إِلَى اللِّقَاءِ</a:t>
@@ -12533,6 +12621,7 @@
                   <a:srgbClr val="D4AF37"/>
                 </a:solidFill>
                 <a:latin typeface="Amiri" pitchFamily="2" charset="-78"/>
+                <a:ea typeface="Amiri" pitchFamily="2" charset="-78"/>
                 <a:cs typeface="Amiri" pitchFamily="2" charset="-78"/>
               </a:rPr>
               <a:t>المُرَاجَعَةُ النِّهَائِيَّةُ</a:t>
@@ -12666,6 +12755,7 @@
                   <a:srgbClr val="D4AF37"/>
                 </a:solidFill>
                 <a:latin typeface="Amiri" pitchFamily="2" charset="-78"/>
+                <a:ea typeface="Amiri" pitchFamily="2" charset="-78"/>
                 <a:cs typeface="Amiri" pitchFamily="2" charset="-78"/>
               </a:rPr>
               <a:t>م</a:t>
@@ -12986,6 +13076,7 @@
                   <a:srgbClr val="8A6D1E"/>
                 </a:solidFill>
                 <a:latin typeface="Amiri" pitchFamily="2" charset="-78"/>
+                <a:ea typeface="Amiri" pitchFamily="2" charset="-78"/>
                 <a:cs typeface="Amiri" pitchFamily="2" charset="-78"/>
               </a:rPr>
               <a:t>آدَابُ الصَّفِّ</a:t>
@@ -14517,6 +14608,7 @@
                   <a:srgbClr val="D4AF37"/>
                 </a:solidFill>
                 <a:latin typeface="Amiri" pitchFamily="2" charset="-78"/>
+                <a:ea typeface="Amiri" pitchFamily="2" charset="-78"/>
                 <a:cs typeface="Amiri" pitchFamily="2" charset="-78"/>
               </a:rPr>
               <a:t>م</a:t>
@@ -14837,6 +14929,7 @@
                   <a:srgbClr val="8A6D1E"/>
                 </a:solidFill>
                 <a:latin typeface="Amiri" pitchFamily="2" charset="-78"/>
+                <a:ea typeface="Amiri" pitchFamily="2" charset="-78"/>
                 <a:cs typeface="Amiri" pitchFamily="2" charset="-78"/>
               </a:rPr>
               <a:t>خَرِيطَةُ الوَرْشَةِ</a:t>
@@ -15151,6 +15244,7 @@
                   <a:srgbClr val="1B3B6F"/>
                 </a:solidFill>
                 <a:latin typeface="Amiri" pitchFamily="2" charset="-78"/>
+                <a:ea typeface="Amiri" pitchFamily="2" charset="-78"/>
                 <a:cs typeface="Amiri" pitchFamily="2" charset="-78"/>
               </a:rPr>
               <a:t>كَيْفَ</a:t>
@@ -15427,6 +15521,7 @@
                   <a:srgbClr val="1E6B52"/>
                 </a:solidFill>
                 <a:latin typeface="Amiri" pitchFamily="2" charset="-78"/>
+                <a:ea typeface="Amiri" pitchFamily="2" charset="-78"/>
                 <a:cs typeface="Amiri" pitchFamily="2" charset="-78"/>
               </a:rPr>
               <a:t>الاسْتِمَارَةُ</a:t>
@@ -15703,6 +15798,7 @@
                   <a:srgbClr val="1E6B52"/>
                 </a:solidFill>
                 <a:latin typeface="Amiri" pitchFamily="2" charset="-78"/>
+                <a:ea typeface="Amiri" pitchFamily="2" charset="-78"/>
                 <a:cs typeface="Amiri" pitchFamily="2" charset="-78"/>
               </a:rPr>
               <a:t>الرِّسَالَةُ</a:t>
@@ -15979,6 +16075,7 @@
                   <a:srgbClr val="1E6B52"/>
                 </a:solidFill>
                 <a:latin typeface="Amiri" pitchFamily="2" charset="-78"/>
+                <a:ea typeface="Amiri" pitchFamily="2" charset="-78"/>
                 <a:cs typeface="Amiri" pitchFamily="2" charset="-78"/>
               </a:rPr>
               <a:t>المَقَالُ</a:t>
@@ -16255,6 +16352,7 @@
                   <a:srgbClr val="8A6D1E"/>
                 </a:solidFill>
                 <a:latin typeface="Amiri" pitchFamily="2" charset="-78"/>
+                <a:ea typeface="Amiri" pitchFamily="2" charset="-78"/>
                 <a:cs typeface="Amiri" pitchFamily="2" charset="-78"/>
               </a:rPr>
               <a:t>قَيِّمْ</a:t>
@@ -16498,6 +16596,7 @@
                   <a:srgbClr val="D4AF37"/>
                 </a:solidFill>
                 <a:latin typeface="Amiri" pitchFamily="2" charset="-78"/>
+                <a:ea typeface="Amiri" pitchFamily="2" charset="-78"/>
                 <a:cs typeface="Amiri" pitchFamily="2" charset="-78"/>
               </a:rPr>
               <a:t>م</a:t>
@@ -16818,6 +16917,7 @@
                   <a:srgbClr val="8A6D1E"/>
                 </a:solidFill>
                 <a:latin typeface="Amiri" pitchFamily="2" charset="-78"/>
+                <a:ea typeface="Amiri" pitchFamily="2" charset="-78"/>
                 <a:cs typeface="Amiri" pitchFamily="2" charset="-78"/>
               </a:rPr>
               <a:t>امْتِحَانُ الكِتَابَةِ</a:t>
@@ -17442,6 +17542,7 @@
                   <a:srgbClr val="1B3B6F"/>
                 </a:solidFill>
                 <a:latin typeface="Amiri" pitchFamily="2" charset="-78"/>
+                <a:ea typeface="Amiri" pitchFamily="2" charset="-78"/>
                 <a:cs typeface="Amiri" pitchFamily="2" charset="-78"/>
               </a:rPr>
               <a:t>وَهِيَ طَالِبَةُ تَبَادُلٍ أُرْدُنِيَّةٌ</a:t>
@@ -17541,6 +17642,7 @@
                   <a:srgbClr val="1B3B6F"/>
                 </a:solidFill>
                 <a:latin typeface="Amiri" pitchFamily="2" charset="-78"/>
+                <a:ea typeface="Amiri" pitchFamily="2" charset="-78"/>
                 <a:cs typeface="Amiri" pitchFamily="2" charset="-78"/>
               </a:rPr>
               <a:t>نَتَعَشَّى مُبَكِّرًا، بَيْنَمَا يَتَعَشَّى النَّاسُ فِي الأُرْدُنِّ مُتَأَخِّرِينَ</a:t>
@@ -17640,6 +17742,7 @@
                   <a:srgbClr val="1B3B6F"/>
                 </a:solidFill>
                 <a:latin typeface="Amiri" pitchFamily="2" charset="-78"/>
+                <a:ea typeface="Amiri" pitchFamily="2" charset="-78"/>
                 <a:cs typeface="Amiri" pitchFamily="2" charset="-78"/>
               </a:rPr>
               <a:t>أَمَّا أُمِّي فَطَبَخَتْ لَهَا … لِكَيْ تَشْعُرَ …</a:t>
@@ -17811,6 +17914,7 @@
                   <a:srgbClr val="D4AF37"/>
                 </a:solidFill>
                 <a:latin typeface="Amiri" pitchFamily="2" charset="-78"/>
+                <a:ea typeface="Amiri" pitchFamily="2" charset="-78"/>
                 <a:cs typeface="Amiri" pitchFamily="2" charset="-78"/>
               </a:rPr>
               <a:t>م</a:t>
@@ -18131,6 +18235,7 @@
                   <a:srgbClr val="8A6D1E"/>
                 </a:solidFill>
                 <a:latin typeface="Amiri" pitchFamily="2" charset="-78"/>
+                <a:ea typeface="Amiri" pitchFamily="2" charset="-78"/>
                 <a:cs typeface="Amiri" pitchFamily="2" charset="-78"/>
               </a:rPr>
               <a:t>اسْتِمَارَةُ العَائِلَةِ المُضِيفَةِ لِطَالِبِ التَّبَادُلِ</a:t>
@@ -18487,6 +18592,7 @@
                   <a:srgbClr val="1B3B6F"/>
                 </a:solidFill>
                 <a:latin typeface="Amiri" pitchFamily="2" charset="-78"/>
+                <a:ea typeface="Amiri" pitchFamily="2" charset="-78"/>
                 <a:cs typeface="Amiri" pitchFamily="2" charset="-78"/>
               </a:rPr>
               <a:t>اسْمُ الطَّالِبَةِ المُضِيفَةِ</a:t>
@@ -18731,6 +18837,7 @@
                   <a:srgbClr val="1B3B6F"/>
                 </a:solidFill>
                 <a:latin typeface="Amiri" pitchFamily="2" charset="-78"/>
+                <a:ea typeface="Amiri" pitchFamily="2" charset="-78"/>
                 <a:cs typeface="Amiri" pitchFamily="2" charset="-78"/>
               </a:rPr>
               <a:t>الجِنْسِيَّةُ</a:t>
@@ -18975,6 +19082,7 @@
                   <a:srgbClr val="1B3B6F"/>
                 </a:solidFill>
                 <a:latin typeface="Amiri" pitchFamily="2" charset="-78"/>
+                <a:ea typeface="Amiri" pitchFamily="2" charset="-78"/>
                 <a:cs typeface="Amiri" pitchFamily="2" charset="-78"/>
               </a:rPr>
               <a:t>لُغَاتُ البَيْتِ</a:t>
@@ -19219,6 +19327,7 @@
                   <a:srgbClr val="1B3B6F"/>
                 </a:solidFill>
                 <a:latin typeface="Amiri" pitchFamily="2" charset="-78"/>
+                <a:ea typeface="Amiri" pitchFamily="2" charset="-78"/>
                 <a:cs typeface="Amiri" pitchFamily="2" charset="-78"/>
               </a:rPr>
               <a:t>عَدَدُ أَفْرَادِ الأُسْرَةِ</a:t>
@@ -19463,6 +19572,7 @@
                   <a:srgbClr val="1B3B6F"/>
                 </a:solidFill>
                 <a:latin typeface="Amiri" pitchFamily="2" charset="-78"/>
+                <a:ea typeface="Amiri" pitchFamily="2" charset="-78"/>
                 <a:cs typeface="Amiri" pitchFamily="2" charset="-78"/>
               </a:rPr>
               <a:t>عَادَةٌ فِي البَيْتِ</a:t>
@@ -19707,6 +19817,7 @@
                   <a:srgbClr val="1B3B6F"/>
                 </a:solidFill>
                 <a:latin typeface="Amiri" pitchFamily="2" charset="-78"/>
+                <a:ea typeface="Amiri" pitchFamily="2" charset="-78"/>
                 <a:cs typeface="Amiri" pitchFamily="2" charset="-78"/>
               </a:rPr>
               <a:t>عِيدٌ خِلَالَ الزِّيَارَةِ</a:t>
@@ -19951,6 +20062,7 @@
                   <a:srgbClr val="1B3B6F"/>
                 </a:solidFill>
                 <a:latin typeface="Amiri" pitchFamily="2" charset="-78"/>
+                <a:ea typeface="Amiri" pitchFamily="2" charset="-78"/>
                 <a:cs typeface="Amiri" pitchFamily="2" charset="-78"/>
               </a:rPr>
               <a:t>مَكَانٌ سَتَزُورَانِهِ مَعًا</a:t>
@@ -20130,6 +20242,7 @@
                   <a:srgbClr val="1B3B6F"/>
                 </a:solidFill>
                 <a:latin typeface="Amiri" pitchFamily="2" charset="-78"/>
+                <a:ea typeface="Amiri" pitchFamily="2" charset="-78"/>
                 <a:cs typeface="Amiri" pitchFamily="2" charset="-78"/>
               </a:rPr>
               <a:t>جُمْلَةٌ: لِمَاذَا تُرِيدِينَ اسْتِضَافَةَ طَالِبَةٍ؟</a:t>
@@ -20339,6 +20452,7 @@
                   <a:srgbClr val="D4AF37"/>
                 </a:solidFill>
                 <a:latin typeface="Amiri" pitchFamily="2" charset="-78"/>
+                <a:ea typeface="Amiri" pitchFamily="2" charset="-78"/>
                 <a:cs typeface="Amiri" pitchFamily="2" charset="-78"/>
               </a:rPr>
               <a:t>م</a:t>
@@ -20659,6 +20773,7 @@
                   <a:srgbClr val="8A6D1E"/>
                 </a:solidFill>
                 <a:latin typeface="Amiri" pitchFamily="2" charset="-78"/>
+                <a:ea typeface="Amiri" pitchFamily="2" charset="-78"/>
                 <a:cs typeface="Amiri" pitchFamily="2" charset="-78"/>
               </a:rPr>
               <a:t>نَمُوذَجُ الإِجَابَةِ</a:t>
@@ -20977,6 +21092,7 @@
                   <a:srgbClr val="1B3B6F"/>
                 </a:solidFill>
                 <a:latin typeface="Amiri" pitchFamily="2" charset="-78"/>
+                <a:ea typeface="Amiri" pitchFamily="2" charset="-78"/>
                 <a:cs typeface="Amiri" pitchFamily="2" charset="-78"/>
               </a:rPr>
               <a:t>سُمَيَّةُ رَحْمَانُ</a:t>
@@ -21015,6 +21131,7 @@
                   <a:srgbClr val="1B3B6F"/>
                 </a:solidFill>
                 <a:latin typeface="Amiri" pitchFamily="2" charset="-78"/>
+                <a:ea typeface="Amiri" pitchFamily="2" charset="-78"/>
                 <a:cs typeface="Amiri" pitchFamily="2" charset="-78"/>
               </a:rPr>
               <a:t>اسْمُ الطَّالِبَةِ المُضِيفَةِ</a:t>
@@ -21156,6 +21273,7 @@
                   <a:srgbClr val="1B3B6F"/>
                 </a:solidFill>
                 <a:latin typeface="Amiri" pitchFamily="2" charset="-78"/>
+                <a:ea typeface="Amiri" pitchFamily="2" charset="-78"/>
                 <a:cs typeface="Amiri" pitchFamily="2" charset="-78"/>
               </a:rPr>
               <a:t>بَرِيطَانِيَّةٌ</a:t>
@@ -21194,6 +21312,7 @@
                   <a:srgbClr val="1B3B6F"/>
                 </a:solidFill>
                 <a:latin typeface="Amiri" pitchFamily="2" charset="-78"/>
+                <a:ea typeface="Amiri" pitchFamily="2" charset="-78"/>
                 <a:cs typeface="Amiri" pitchFamily="2" charset="-78"/>
               </a:rPr>
               <a:t>الجِنْسِيَّةُ</a:t>
@@ -21335,6 +21454,7 @@
                   <a:srgbClr val="1B3B6F"/>
                 </a:solidFill>
                 <a:latin typeface="Amiri" pitchFamily="2" charset="-78"/>
+                <a:ea typeface="Amiri" pitchFamily="2" charset="-78"/>
                 <a:cs typeface="Amiri" pitchFamily="2" charset="-78"/>
               </a:rPr>
               <a:t>الإِنْجْلِيزِيَّةُ وَالعَرَبِيَّةُ وَالبَنْغَالِيَّةُ</a:t>
@@ -21373,6 +21493,7 @@
                   <a:srgbClr val="1B3B6F"/>
                 </a:solidFill>
                 <a:latin typeface="Amiri" pitchFamily="2" charset="-78"/>
+                <a:ea typeface="Amiri" pitchFamily="2" charset="-78"/>
                 <a:cs typeface="Amiri" pitchFamily="2" charset="-78"/>
               </a:rPr>
               <a:t>لُغَاتُ البَيْتِ</a:t>
@@ -21514,6 +21635,7 @@
                   <a:srgbClr val="1B3B6F"/>
                 </a:solidFill>
                 <a:latin typeface="Amiri" pitchFamily="2" charset="-78"/>
+                <a:ea typeface="Amiri" pitchFamily="2" charset="-78"/>
                 <a:cs typeface="Amiri" pitchFamily="2" charset="-78"/>
               </a:rPr>
               <a:t>خَمْسَةٌ</a:t>
@@ -21552,6 +21674,7 @@
                   <a:srgbClr val="1B3B6F"/>
                 </a:solidFill>
                 <a:latin typeface="Amiri" pitchFamily="2" charset="-78"/>
+                <a:ea typeface="Amiri" pitchFamily="2" charset="-78"/>
                 <a:cs typeface="Amiri" pitchFamily="2" charset="-78"/>
               </a:rPr>
               <a:t>عَدَدُ أَفْرَادِ الأُسْرَةِ</a:t>
@@ -21693,6 +21816,7 @@
                   <a:srgbClr val="1B3B6F"/>
                 </a:solidFill>
                 <a:latin typeface="Amiri" pitchFamily="2" charset="-78"/>
+                <a:ea typeface="Amiri" pitchFamily="2" charset="-78"/>
                 <a:cs typeface="Amiri" pitchFamily="2" charset="-78"/>
               </a:rPr>
               <a:t>خَلْعُ الأَحْذِيَةِ</a:t>
@@ -21731,6 +21855,7 @@
                   <a:srgbClr val="1B3B6F"/>
                 </a:solidFill>
                 <a:latin typeface="Amiri" pitchFamily="2" charset="-78"/>
+                <a:ea typeface="Amiri" pitchFamily="2" charset="-78"/>
                 <a:cs typeface="Amiri" pitchFamily="2" charset="-78"/>
               </a:rPr>
               <a:t>عَادَةٌ فِي البَيْتِ</a:t>
@@ -21872,6 +21997,7 @@
                   <a:srgbClr val="1B3B6F"/>
                 </a:solidFill>
                 <a:latin typeface="Amiri" pitchFamily="2" charset="-78"/>
+                <a:ea typeface="Amiri" pitchFamily="2" charset="-78"/>
                 <a:cs typeface="Amiri" pitchFamily="2" charset="-78"/>
               </a:rPr>
               <a:t>عِيدُ الفِطْرِ</a:t>
@@ -21910,6 +22036,7 @@
                   <a:srgbClr val="1B3B6F"/>
                 </a:solidFill>
                 <a:latin typeface="Amiri" pitchFamily="2" charset="-78"/>
+                <a:ea typeface="Amiri" pitchFamily="2" charset="-78"/>
                 <a:cs typeface="Amiri" pitchFamily="2" charset="-78"/>
               </a:rPr>
               <a:t>عِيدٌ خِلَالَ الزِّيَارَةِ</a:t>
@@ -22051,6 +22178,7 @@
                   <a:srgbClr val="1B3B6F"/>
                 </a:solidFill>
                 <a:latin typeface="Amiri" pitchFamily="2" charset="-78"/>
+                <a:ea typeface="Amiri" pitchFamily="2" charset="-78"/>
                 <a:cs typeface="Amiri" pitchFamily="2" charset="-78"/>
               </a:rPr>
               <a:t>المُتْحَفُ البَرِيطَانِيُّ</a:t>
@@ -22089,6 +22217,7 @@
                   <a:srgbClr val="1B3B6F"/>
                 </a:solidFill>
                 <a:latin typeface="Amiri" pitchFamily="2" charset="-78"/>
+                <a:ea typeface="Amiri" pitchFamily="2" charset="-78"/>
                 <a:cs typeface="Amiri" pitchFamily="2" charset="-78"/>
               </a:rPr>
               <a:t>مَكَانٌ سَتَزُورَانِهِ مَعًا</a:t>
@@ -22230,6 +22359,7 @@
                   <a:srgbClr val="1B3B6F"/>
                 </a:solidFill>
                 <a:latin typeface="Amiri" pitchFamily="2" charset="-78"/>
+                <a:ea typeface="Amiri" pitchFamily="2" charset="-78"/>
                 <a:cs typeface="Amiri" pitchFamily="2" charset="-78"/>
               </a:rPr>
               <a:t>أُرِيدُ أَنْ أَتَعَرَّفَ عَلَى ثَقَافَةٍ جَدِيدَةٍ، لِأَنَّ ذٰلِكَ سَيَجْعَلُنِي أَفْهَمُ العَالَمَ أَكْثَرَ.</a:t>
@@ -22268,6 +22398,7 @@
                   <a:srgbClr val="1B3B6F"/>
                 </a:solidFill>
                 <a:latin typeface="Amiri" pitchFamily="2" charset="-78"/>
+                <a:ea typeface="Amiri" pitchFamily="2" charset="-78"/>
                 <a:cs typeface="Amiri" pitchFamily="2" charset="-78"/>
               </a:rPr>
               <a:t>جُمْلَةٌ: لِمَاذَا تُرِيدِينَ اسْتِضَافَةَ طَالِبَةٍ؟</a:t>
@@ -22477,6 +22608,7 @@
                   <a:srgbClr val="D4AF37"/>
                 </a:solidFill>
                 <a:latin typeface="Amiri" pitchFamily="2" charset="-78"/>
+                <a:ea typeface="Amiri" pitchFamily="2" charset="-78"/>
                 <a:cs typeface="Amiri" pitchFamily="2" charset="-78"/>
               </a:rPr>
               <a:t>م</a:t>
@@ -22797,6 +22929,7 @@
                   <a:srgbClr val="8A6D1E"/>
                 </a:solidFill>
                 <a:latin typeface="Amiri" pitchFamily="2" charset="-78"/>
+                <a:ea typeface="Amiri" pitchFamily="2" charset="-78"/>
                 <a:cs typeface="Amiri" pitchFamily="2" charset="-78"/>
               </a:rPr>
               <a:t>ضَيْفَتُنَا مِنَ الأُرْدُنِّ</a:t>
@@ -23272,6 +23405,7 @@
                   <a:srgbClr val="1B3B6F"/>
                 </a:solidFill>
                 <a:latin typeface="Amiri" pitchFamily="2" charset="-78"/>
+                <a:ea typeface="Amiri" pitchFamily="2" charset="-78"/>
                 <a:cs typeface="Amiri" pitchFamily="2" charset="-78"/>
               </a:rPr>
               <a:t>اسْمُهَا … ، وَهِيَ طَالِبَةُ تَبَادُلٍ …</a:t>
@@ -23348,6 +23482,7 @@
                   <a:srgbClr val="1B3B6F"/>
                 </a:solidFill>
                 <a:latin typeface="Amiri" pitchFamily="2" charset="-78"/>
+                <a:ea typeface="Amiri" pitchFamily="2" charset="-78"/>
                 <a:cs typeface="Amiri" pitchFamily="2" charset="-78"/>
               </a:rPr>
               <a:t>فِي اليَوْمِ الأَوَّلِ أَخَذْتُهَا إِلَى …</a:t>
@@ -23424,6 +23559,7 @@
                   <a:srgbClr val="1B3B6F"/>
                 </a:solidFill>
                 <a:latin typeface="Amiri" pitchFamily="2" charset="-78"/>
+                <a:ea typeface="Amiri" pitchFamily="2" charset="-78"/>
                 <a:cs typeface="Amiri" pitchFamily="2" charset="-78"/>
               </a:rPr>
               <a:t>… بَيْنَمَا يَتَعَشَّى النَّاسُ فِي …</a:t>
@@ -23500,6 +23636,7 @@
                   <a:srgbClr val="1B3B6F"/>
                 </a:solidFill>
                 <a:latin typeface="Amiri" pitchFamily="2" charset="-78"/>
+                <a:ea typeface="Amiri" pitchFamily="2" charset="-78"/>
                 <a:cs typeface="Amiri" pitchFamily="2" charset="-78"/>
               </a:rPr>
               <a:t>فِي الصَّيْفِ سَأَزُورُهَا فِي …</a:t>
@@ -23671,6 +23808,7 @@
                   <a:srgbClr val="D4AF37"/>
                 </a:solidFill>
                 <a:latin typeface="Amiri" pitchFamily="2" charset="-78"/>
+                <a:ea typeface="Amiri" pitchFamily="2" charset="-78"/>
                 <a:cs typeface="Amiri" pitchFamily="2" charset="-78"/>
               </a:rPr>
               <a:t>م</a:t>
@@ -23991,6 +24129,7 @@
                   <a:srgbClr val="8A6D1E"/>
                 </a:solidFill>
                 <a:latin typeface="Amiri" pitchFamily="2" charset="-78"/>
+                <a:ea typeface="Amiri" pitchFamily="2" charset="-78"/>
                 <a:cs typeface="Amiri" pitchFamily="2" charset="-78"/>
               </a:rPr>
               <a:t>نَصُّ السُّؤَالِ</a:t>
@@ -24271,6 +24410,7 @@
                   <a:srgbClr val="1B3B6F"/>
                 </a:solidFill>
                 <a:latin typeface="Amiri" pitchFamily="2" charset="-78"/>
+                <a:ea typeface="Amiri" pitchFamily="2" charset="-78"/>
                 <a:cs typeface="Amiri" pitchFamily="2" charset="-78"/>
               </a:rPr>
               <a:t>اكْتُبِي رِسَالَةً إِلَى صَدِيقَتِكِ عَنْ طَالِبَةِ التَّبَادُلِ الَّتِي تُقِيمُ عِنْدَكُمْ (٨٠–٩٠ كَلِمَةً).</a:t>
@@ -24412,6 +24552,7 @@
                   <a:srgbClr val="1B3B6F"/>
                 </a:solidFill>
                 <a:latin typeface="Amiri" pitchFamily="2" charset="-78"/>
+                <a:ea typeface="Amiri" pitchFamily="2" charset="-78"/>
                 <a:cs typeface="Amiri" pitchFamily="2" charset="-78"/>
               </a:rPr>
               <a:t>مَنْ ضَيْفَتُكِ؟ وَكَمْ سَتَبْقَى؟</a:t>
@@ -24553,6 +24694,7 @@
                   <a:srgbClr val="1B3B6F"/>
                 </a:solidFill>
                 <a:latin typeface="Amiri" pitchFamily="2" charset="-78"/>
+                <a:ea typeface="Amiri" pitchFamily="2" charset="-78"/>
                 <a:cs typeface="Amiri" pitchFamily="2" charset="-78"/>
               </a:rPr>
               <a:t>مَاذَا فَعَلْتُمَا فِي اليَوْمِ الأَوَّلِ؟</a:t>
@@ -24694,6 +24836,7 @@
                   <a:srgbClr val="1B3B6F"/>
                 </a:solidFill>
                 <a:latin typeface="Amiri" pitchFamily="2" charset="-78"/>
+                <a:ea typeface="Amiri" pitchFamily="2" charset="-78"/>
                 <a:cs typeface="Amiri" pitchFamily="2" charset="-78"/>
               </a:rPr>
               <a:t>مَا الاخْتِلَافُ الثَّقَافِيُّ الَّذِي لَاحَظْتُمَاهُ؟</a:t>
@@ -24835,6 +24978,7 @@
                   <a:srgbClr val="1B3B6F"/>
                 </a:solidFill>
                 <a:latin typeface="Amiri" pitchFamily="2" charset="-78"/>
+                <a:ea typeface="Amiri" pitchFamily="2" charset="-78"/>
                 <a:cs typeface="Amiri" pitchFamily="2" charset="-78"/>
               </a:rPr>
               <a:t>مَا رَأْيُكِ فِي التَّبَادُلِ؟ وَمَا خِطَطُكِ؟ وَاسْأَلِي صَدِيقَتَكِ سُؤَالًا.</a:t>
@@ -25044,6 +25188,7 @@
                   <a:srgbClr val="D4AF37"/>
                 </a:solidFill>
                 <a:latin typeface="Amiri" pitchFamily="2" charset="-78"/>
+                <a:ea typeface="Amiri" pitchFamily="2" charset="-78"/>
                 <a:cs typeface="Amiri" pitchFamily="2" charset="-78"/>
               </a:rPr>
               <a:t>م</a:t>
@@ -25364,6 +25509,7 @@
                   <a:srgbClr val="8A6D1E"/>
                 </a:solidFill>
                 <a:latin typeface="Amiri" pitchFamily="2" charset="-78"/>
+                <a:ea typeface="Amiri" pitchFamily="2" charset="-78"/>
                 <a:cs typeface="Amiri" pitchFamily="2" charset="-78"/>
               </a:rPr>
               <a:t>قَوَالِبُ الكِتَابَةِ</a:t>
@@ -25644,6 +25790,7 @@
                   <a:srgbClr val="1B3B6F"/>
                 </a:solidFill>
                 <a:latin typeface="Amiri" pitchFamily="2" charset="-78"/>
+                <a:ea typeface="Amiri" pitchFamily="2" charset="-78"/>
                 <a:cs typeface="Amiri" pitchFamily="2" charset="-78"/>
               </a:rPr>
               <a:t>مَرْحَبًا يَا ______ ، كَيْفَ حَالُكِ؟</a:t>
@@ -25850,6 +25997,7 @@
                   <a:srgbClr val="1B3B6F"/>
                 </a:solidFill>
                 <a:latin typeface="Amiri" pitchFamily="2" charset="-78"/>
+                <a:ea typeface="Amiri" pitchFamily="2" charset="-78"/>
                 <a:cs typeface="Amiri" pitchFamily="2" charset="-78"/>
               </a:rPr>
               <a:t>عِنْدِي ضَيْفَةٌ: اسْمُهَا ______ ، وَهِيَ ______ .</a:t>
@@ -26056,6 +26204,7 @@
                   <a:srgbClr val="1B3B6F"/>
                 </a:solidFill>
                 <a:latin typeface="Amiri" pitchFamily="2" charset="-78"/>
+                <a:ea typeface="Amiri" pitchFamily="2" charset="-78"/>
                 <a:cs typeface="Amiri" pitchFamily="2" charset="-78"/>
               </a:rPr>
               <a:t>فِي اليَوْمِ الأَوَّلِ أَخَذْتُهَا إِلَى ______ ، ثُمَّ ______ .</a:t>
@@ -26262,6 +26411,7 @@
                   <a:srgbClr val="1B3B6F"/>
                 </a:solidFill>
                 <a:latin typeface="Amiri" pitchFamily="2" charset="-78"/>
+                <a:ea typeface="Amiri" pitchFamily="2" charset="-78"/>
                 <a:cs typeface="Amiri" pitchFamily="2" charset="-78"/>
               </a:rPr>
               <a:t>نَحْنُ ______ ، بَيْنَمَا ______ .</a:t>
@@ -26468,6 +26618,7 @@
                   <a:srgbClr val="1B3B6F"/>
                 </a:solidFill>
                 <a:latin typeface="Amiri" pitchFamily="2" charset="-78"/>
+                <a:ea typeface="Amiri" pitchFamily="2" charset="-78"/>
                 <a:cs typeface="Amiri" pitchFamily="2" charset="-78"/>
               </a:rPr>
               <a:t>أَظُنُّ أَنَّ التَّبَادُلَ ______ . سَأَزُورُهَا ______ .</a:t>
@@ -26674,6 +26825,7 @@
                   <a:srgbClr val="1B3B6F"/>
                 </a:solidFill>
                 <a:latin typeface="Amiri" pitchFamily="2" charset="-78"/>
+                <a:ea typeface="Amiri" pitchFamily="2" charset="-78"/>
                 <a:cs typeface="Amiri" pitchFamily="2" charset="-78"/>
               </a:rPr>
               <a:t>وَأَنْتِ، ______ ؟ مَعَ السَّلَامَةِ.</a:t>
@@ -26913,13 +27065,9 @@
     <a:fontScheme name="Office">
       <a:majorFont>
         <a:latin typeface="Calibri Light" panose="020F0302020204030204"/>
-        <a:ea typeface=""/>
-        <a:cs typeface=""/>
-        <a:font script="Jpan" typeface="游ゴシック Light"/>
-        <a:font script="Hang" typeface="맑은 고딕"/>
-        <a:font script="Hans" typeface="等线 Light"/>
-        <a:font script="Hant" typeface="新細明體"/>
-        <a:font script="Arab" typeface="Times New Roman"/>
+        <a:ea typeface="Amiri" pitchFamily="2" charset="-78"/>
+        <a:cs typeface="Amiri" pitchFamily="2" charset="-78"/>
+        <a:font script="Arab" typeface="Amiri"/>
         <a:font script="Hebr" typeface="Times New Roman"/>
         <a:font script="Thai" typeface="Angsana New"/>
         <a:font script="Ethi" typeface="Nyala"/>
@@ -26965,13 +27113,9 @@
       </a:majorFont>
       <a:minorFont>
         <a:latin typeface="Calibri" panose="020F0502020204030204"/>
-        <a:ea typeface=""/>
-        <a:cs typeface=""/>
-        <a:font script="Jpan" typeface="游ゴシック"/>
-        <a:font script="Hang" typeface="맑은 고딕"/>
-        <a:font script="Hans" typeface="等线"/>
-        <a:font script="Hant" typeface="新細明體"/>
-        <a:font script="Arab" typeface="Arial"/>
+        <a:ea typeface="Amiri" pitchFamily="2" charset="-78"/>
+        <a:cs typeface="Amiri" pitchFamily="2" charset="-78"/>
+        <a:font script="Arab" typeface="Amiri"/>
         <a:font script="Hebr" typeface="Arial"/>
         <a:font script="Thai" typeface="Cordia New"/>
         <a:font script="Ethi" typeface="Nyala"/>

--- a/Topic_E/Exam_Practice/TE-L12_Writing_Workshop_Topic_E_Review_and_Bridge_to_Final_Revision.pptx
+++ b/Topic_E/Exam_Practice/TE-L12_Writing_Workshop_Topic_E_Review_and_Bridge_to_Final_Revision.pptx
@@ -3848,7 +3848,7 @@
                 <a:solidFill>
                   <a:srgbClr val="FFFFFF"/>
                 </a:solidFill>
-                <a:latin typeface="Calibri" pitchFamily="34" charset="0"/>
+                <a:latin typeface="Amiri" pitchFamily="2" charset="-78"/>
                 <a:ea typeface="Amiri" pitchFamily="2" charset="-78"/>
                 <a:cs typeface="Amiri" pitchFamily="2" charset="-78"/>
               </a:rPr>
@@ -3914,7 +3914,7 @@
                 <a:solidFill>
                   <a:srgbClr val="FFFFFF"/>
                 </a:solidFill>
-                <a:latin typeface="Calibri" pitchFamily="34" charset="0"/>
+                <a:latin typeface="Amiri" pitchFamily="2" charset="-78"/>
                 <a:ea typeface="Amiri" pitchFamily="2" charset="-78"/>
                 <a:cs typeface="Amiri" pitchFamily="2" charset="-78"/>
               </a:rPr>
@@ -3980,7 +3980,7 @@
                 <a:solidFill>
                   <a:srgbClr val="FFFFFF"/>
                 </a:solidFill>
-                <a:latin typeface="Calibri" pitchFamily="34" charset="0"/>
+                <a:latin typeface="Amiri" pitchFamily="2" charset="-78"/>
                 <a:ea typeface="Amiri" pitchFamily="2" charset="-78"/>
                 <a:cs typeface="Amiri" pitchFamily="2" charset="-78"/>
               </a:rPr>
@@ -4046,7 +4046,7 @@
                 <a:solidFill>
                   <a:srgbClr val="FFFFFF"/>
                 </a:solidFill>
-                <a:latin typeface="Calibri" pitchFamily="34" charset="0"/>
+                <a:latin typeface="Amiri" pitchFamily="2" charset="-78"/>
                 <a:ea typeface="Amiri" pitchFamily="2" charset="-78"/>
                 <a:cs typeface="Amiri" pitchFamily="2" charset="-78"/>
               </a:rPr>
@@ -4844,7 +4844,7 @@
                 <a:solidFill>
                   <a:srgbClr val="FFFFFF"/>
                 </a:solidFill>
-                <a:latin typeface="Calibri" pitchFamily="34" charset="0"/>
+                <a:latin typeface="Amiri" pitchFamily="2" charset="-78"/>
                 <a:ea typeface="Amiri" pitchFamily="2" charset="-78"/>
                 <a:cs typeface="Amiri" pitchFamily="2" charset="-78"/>
               </a:rPr>
@@ -4910,7 +4910,7 @@
                 <a:solidFill>
                   <a:srgbClr val="FFFFFF"/>
                 </a:solidFill>
-                <a:latin typeface="Calibri" pitchFamily="34" charset="0"/>
+                <a:latin typeface="Amiri" pitchFamily="2" charset="-78"/>
                 <a:ea typeface="Amiri" pitchFamily="2" charset="-78"/>
                 <a:cs typeface="Amiri" pitchFamily="2" charset="-78"/>
               </a:rPr>
@@ -4976,7 +4976,7 @@
                 <a:solidFill>
                   <a:srgbClr val="FFFFFF"/>
                 </a:solidFill>
-                <a:latin typeface="Calibri" pitchFamily="34" charset="0"/>
+                <a:latin typeface="Amiri" pitchFamily="2" charset="-78"/>
                 <a:ea typeface="Amiri" pitchFamily="2" charset="-78"/>
                 <a:cs typeface="Amiri" pitchFamily="2" charset="-78"/>
               </a:rPr>
@@ -5042,7 +5042,7 @@
                 <a:solidFill>
                   <a:srgbClr val="FFFFFF"/>
                 </a:solidFill>
-                <a:latin typeface="Calibri" pitchFamily="34" charset="0"/>
+                <a:latin typeface="Amiri" pitchFamily="2" charset="-78"/>
                 <a:ea typeface="Amiri" pitchFamily="2" charset="-78"/>
                 <a:cs typeface="Amiri" pitchFamily="2" charset="-78"/>
               </a:rPr>
@@ -8599,7 +8599,7 @@
                 <a:solidFill>
                   <a:srgbClr val="FFFFFF"/>
                 </a:solidFill>
-                <a:latin typeface="Calibri" pitchFamily="34" charset="0"/>
+                <a:latin typeface="Amiri" pitchFamily="2" charset="-78"/>
                 <a:ea typeface="Amiri" pitchFamily="2" charset="-78"/>
                 <a:cs typeface="Amiri" pitchFamily="2" charset="-78"/>
               </a:rPr>
@@ -8665,7 +8665,7 @@
                 <a:solidFill>
                   <a:srgbClr val="FFFFFF"/>
                 </a:solidFill>
-                <a:latin typeface="Calibri" pitchFamily="34" charset="0"/>
+                <a:latin typeface="Amiri" pitchFamily="2" charset="-78"/>
                 <a:ea typeface="Amiri" pitchFamily="2" charset="-78"/>
                 <a:cs typeface="Amiri" pitchFamily="2" charset="-78"/>
               </a:rPr>
@@ -8731,7 +8731,7 @@
                 <a:solidFill>
                   <a:srgbClr val="FFFFFF"/>
                 </a:solidFill>
-                <a:latin typeface="Calibri" pitchFamily="34" charset="0"/>
+                <a:latin typeface="Amiri" pitchFamily="2" charset="-78"/>
                 <a:ea typeface="Amiri" pitchFamily="2" charset="-78"/>
                 <a:cs typeface="Amiri" pitchFamily="2" charset="-78"/>
               </a:rPr>
@@ -8797,7 +8797,7 @@
                 <a:solidFill>
                   <a:srgbClr val="FFFFFF"/>
                 </a:solidFill>
-                <a:latin typeface="Calibri" pitchFamily="34" charset="0"/>
+                <a:latin typeface="Amiri" pitchFamily="2" charset="-78"/>
                 <a:ea typeface="Amiri" pitchFamily="2" charset="-78"/>
                 <a:cs typeface="Amiri" pitchFamily="2" charset="-78"/>
               </a:rPr>
@@ -9584,7 +9584,7 @@
                 <a:solidFill>
                   <a:srgbClr val="FFFFFF"/>
                 </a:solidFill>
-                <a:latin typeface="Calibri" pitchFamily="34" charset="0"/>
+                <a:latin typeface="Amiri" pitchFamily="2" charset="-78"/>
                 <a:ea typeface="Amiri" pitchFamily="2" charset="-78"/>
                 <a:cs typeface="Amiri" pitchFamily="2" charset="-78"/>
               </a:rPr>
@@ -9650,7 +9650,7 @@
                 <a:solidFill>
                   <a:srgbClr val="FFFFFF"/>
                 </a:solidFill>
-                <a:latin typeface="Calibri" pitchFamily="34" charset="0"/>
+                <a:latin typeface="Amiri" pitchFamily="2" charset="-78"/>
                 <a:ea typeface="Amiri" pitchFamily="2" charset="-78"/>
                 <a:cs typeface="Amiri" pitchFamily="2" charset="-78"/>
               </a:rPr>
@@ -9716,7 +9716,7 @@
                 <a:solidFill>
                   <a:srgbClr val="FFFFFF"/>
                 </a:solidFill>
-                <a:latin typeface="Calibri" pitchFamily="34" charset="0"/>
+                <a:latin typeface="Amiri" pitchFamily="2" charset="-78"/>
                 <a:ea typeface="Amiri" pitchFamily="2" charset="-78"/>
                 <a:cs typeface="Amiri" pitchFamily="2" charset="-78"/>
               </a:rPr>
@@ -9782,7 +9782,7 @@
                 <a:solidFill>
                   <a:srgbClr val="FFFFFF"/>
                 </a:solidFill>
-                <a:latin typeface="Calibri" pitchFamily="34" charset="0"/>
+                <a:latin typeface="Amiri" pitchFamily="2" charset="-78"/>
                 <a:ea typeface="Amiri" pitchFamily="2" charset="-78"/>
                 <a:cs typeface="Amiri" pitchFamily="2" charset="-78"/>
               </a:rPr>
@@ -10569,7 +10569,7 @@
                 <a:solidFill>
                   <a:srgbClr val="FFFFFF"/>
                 </a:solidFill>
-                <a:latin typeface="Calibri" pitchFamily="34" charset="0"/>
+                <a:latin typeface="Amiri" pitchFamily="2" charset="-78"/>
                 <a:ea typeface="Amiri" pitchFamily="2" charset="-78"/>
                 <a:cs typeface="Amiri" pitchFamily="2" charset="-78"/>
               </a:rPr>
@@ -10635,7 +10635,7 @@
                 <a:solidFill>
                   <a:srgbClr val="FFFFFF"/>
                 </a:solidFill>
-                <a:latin typeface="Calibri" pitchFamily="34" charset="0"/>
+                <a:latin typeface="Amiri" pitchFamily="2" charset="-78"/>
                 <a:ea typeface="Amiri" pitchFamily="2" charset="-78"/>
                 <a:cs typeface="Amiri" pitchFamily="2" charset="-78"/>
               </a:rPr>
@@ -10701,7 +10701,7 @@
                 <a:solidFill>
                   <a:srgbClr val="FFFFFF"/>
                 </a:solidFill>
-                <a:latin typeface="Calibri" pitchFamily="34" charset="0"/>
+                <a:latin typeface="Amiri" pitchFamily="2" charset="-78"/>
                 <a:ea typeface="Amiri" pitchFamily="2" charset="-78"/>
                 <a:cs typeface="Amiri" pitchFamily="2" charset="-78"/>
               </a:rPr>
@@ -10767,7 +10767,7 @@
                 <a:solidFill>
                   <a:srgbClr val="FFFFFF"/>
                 </a:solidFill>
-                <a:latin typeface="Calibri" pitchFamily="34" charset="0"/>
+                <a:latin typeface="Amiri" pitchFamily="2" charset="-78"/>
                 <a:ea typeface="Amiri" pitchFamily="2" charset="-78"/>
                 <a:cs typeface="Amiri" pitchFamily="2" charset="-78"/>
               </a:rPr>
